--- a/plans/ppt/TW-SELFSELECT台股買賣自動化系統-W4-講稿版.pptx
+++ b/plans/ppt/TW-SELFSELECT台股買賣自動化系統-W4-講稿版.pptx
@@ -504,7 +504,7 @@
           </a:p>
           <a:p>
             <a:r>
-              <a:t>前幾週我們建好了環境、學會了跟 Opencode 溝通。這一週是整個課程的核心中的核心——我們要深入認識系統內建的五大策略：它們的原理是什麼、適合什麼盤勢、什麼時候買、什麼時候賣。</a:t>
+              <a:t>前幾週我們建好了環境、學會了跟 DSH 溝通。這一週是整個課程的核心中的核心——我們要深入認識系統內建的五大策略：它們的原理是什麼、適合什麼盤勢、什麼時候買、什麼時候賣。</a:t>
             </a:r>
           </a:p>
           <a:p>
@@ -14913,7 +14913,7 @@
                 <a:uFillTx/>
                 <a:latin typeface="Century Gothic"/>
               </a:rPr>
-              <a:t>使用</a:t>
+              <a:t>使用 Python 與 DSH</a:t>
             </a:r>
             <a:r>
               <a:rPr lang="en-US" sz="2400" b="0" u="none" strike="noStrike">
@@ -14927,7 +14927,7 @@
                 <a:uFillTx/>
                 <a:latin typeface="Century Gothic"/>
               </a:rPr>
-              <a:t>Python</a:t>
+              <a:t/>
             </a:r>
             <a:r>
               <a:rPr lang="zh-TW" sz="2400" b="0" u="none" strike="noStrike">
@@ -14941,7 +14941,7 @@
                 <a:uFillTx/>
                 <a:latin typeface="Century Gothic"/>
               </a:rPr>
-              <a:t>與</a:t>
+              <a:t/>
             </a:r>
             <a:r>
               <a:rPr lang="en-US" sz="2400" b="0" u="none" strike="noStrike">
@@ -14955,7 +14955,7 @@
                 <a:uFillTx/>
                 <a:latin typeface="Century Gothic"/>
               </a:rPr>
-              <a:t>Opencode AI</a:t>
+              <a:t/>
             </a:r>
             <a:endParaRPr lang="en-US" sz="2400" b="0" u="none" strike="noStrike">
               <a:solidFill>

--- a/plans/ppt/TW-SELFSELECT台股買賣自動化系統-W4-講稿版.pptx
+++ b/plans/ppt/TW-SELFSELECT台股買賣自動化系統-W4-講稿版.pptx
@@ -31,6 +31,7 @@
     <p:sldId id="275" r:id="rId24"/>
     <p:sldId id="276" r:id="rId25"/>
     <p:sldId id="277" r:id="rId26"/>
+    <p:sldId id="295" r:id="rId32"/>
     <p:sldId id="289" r:id="rId38"/>
     <p:sldId id="290" r:id="rId39"/>
     <p:sldId id="292" r:id="rId41"/>
@@ -2361,6 +2362,108 @@
       </p:sp>
     </p:spTree>
   </p:cSld>
+</p:notes>
+</file>
+
+<file path=ppt/notesSlides/notesSlide25.xml><?xml version="1.0" encoding="utf-8"?>
+<p:notes xmlns:a="http://schemas.openxmlformats.org/drawingml/2006/main" xmlns:p="http://schemas.openxmlformats.org/presentationml/2006/main" xmlns:r="http://schemas.openxmlformats.org/officeDocument/2006/relationships">
+  <p:cSld>
+    <p:spTree>
+      <p:nvGrpSpPr>
+        <p:cNvPr id="1" name=""/>
+        <p:cNvGrpSpPr/>
+        <p:nvPr/>
+      </p:nvGrpSpPr>
+      <p:grpSpPr>
+        <a:xfrm>
+          <a:off x="0" y="0"/>
+          <a:ext cx="0" cy="0"/>
+          <a:chOff x="0" y="0"/>
+          <a:chExt cx="0" cy="0"/>
+        </a:xfrm>
+      </p:grpSpPr>
+      <p:sp>
+        <p:nvSpPr>
+          <p:cNvPr id="2" name="Slide Image Placeholder 1"/>
+          <p:cNvSpPr>
+            <a:spLocks noGrp="1"/>
+          </p:cNvSpPr>
+          <p:nvPr>
+            <p:ph type="sldImg"/>
+          </p:nvPr>
+        </p:nvSpPr>
+        <p:spPr/>
+      </p:sp>
+      <p:sp>
+        <p:nvSpPr>
+          <p:cNvPr id="3" name="Notes Placeholder 2"/>
+          <p:cNvSpPr>
+            <a:spLocks noGrp="1"/>
+          </p:cNvSpPr>
+          <p:nvPr>
+            <p:ph type="body"/>
+          </p:nvPr>
+        </p:nvSpPr>
+        <p:spPr/>
+        <p:txBody>
+          <a:bodyPr/>
+          <a:lstStyle/>
+          <a:p>
+            <a:r>
+              <a:t>⏱ 建議時間：1 分 30 秒</a:t>
+            </a:r>
+          </a:p>
+          <a:p/>
+          <a:p>
+            <a:r>
+              <a:t>型態感知 auto：不鎖死一種策略，而是依「該股當下的型態」在四種策略中挑一個。</a:t>
+            </a:r>
+          </a:p>
+          <a:p>
+            <a:r>
+              <a:t>路由規則：趨勢成立（價 &gt; MA20、MA20 &gt; MA60、20 日動能 &gt; 0）→ 順勢族；動能 &gt;5% 用 breakout，否則 ma_cross。非趨勢時，跌破 MA20 用 bollinger（買低），仍在 MA20 上方用 vwap（盤整偏離）。</a:t>
+            </a:r>
+          </a:p>
+          <a:p>
+            <a:r>
+              <a:t>重點一：同一檔只會落入順勢或回歸其中一族，持有期間固定，不會一下追高一下抄底；但不同檔可以同時有兩族（例：四檔 breakout＋一檔 bollinger），這是刻意分散。</a:t>
+            </a:r>
+          </a:p>
+          <a:p>
+            <a:r>
+              <a:t>重點二：買進前每天重判；成交當下鎖定並寫入 logs/auto_resolved.json；賣到零股才釋放，下次買進重新判斷。</a:t>
+            </a:r>
+          </a:p>
+          <a:p>
+            <a:r>
+              <a:t>重點三：選股建議表的 auto→X 是基準日路由，實際鎖定在成交日——差一個交易日，型態若改變，鎖到的策略可能不同。</a:t>
+            </a:r>
+          </a:p>
+          <a:p/>
+          <a:p>
+            <a:r>
+              <a:t>【講師提示】用「員工各有專長、就位後不換人」比喻鎖定；強調「同一檔不混族」與「不同檔可混族」。</a:t>
+            </a:r>
+          </a:p>
+        </p:txBody>
+      </p:sp>
+      <p:sp>
+        <p:nvSpPr>
+          <p:cNvPr id="4" name="Slide Number Placeholder 3"/>
+          <p:cNvSpPr>
+            <a:spLocks noGrp="1"/>
+          </p:cNvSpPr>
+          <p:nvPr>
+            <p:ph type="sldNum" idx="24"/>
+          </p:nvPr>
+        </p:nvSpPr>
+        <p:spPr/>
+      </p:sp>
+    </p:spTree>
+  </p:cSld>
+  <p:clrMapOvr>
+    <a:masterClrMapping/>
+  </p:clrMapOvr>
 </p:notes>
 </file>
 
@@ -23215,6 +23318,875 @@
 </file>
 
 <file path=ppt/slides/slide23.xml><?xml version="1.0" encoding="utf-8"?>
+<p:sld xmlns:a="http://schemas.openxmlformats.org/drawingml/2006/main" xmlns:p="http://schemas.openxmlformats.org/presentationml/2006/main" xmlns:r="http://schemas.openxmlformats.org/officeDocument/2006/relationships">
+  <p:cSld>
+    <p:spTree>
+      <p:nvGrpSpPr>
+        <p:cNvPr id="1" name=""/>
+        <p:cNvGrpSpPr/>
+        <p:nvPr/>
+      </p:nvGrpSpPr>
+      <p:grpSpPr/>
+      <p:sp>
+        <p:nvSpPr>
+          <p:cNvPr id="222" name="Text 0"/>
+          <p:cNvSpPr/>
+          <p:nvPr/>
+        </p:nvSpPr>
+        <p:spPr>
+          <a:xfrm>
+            <a:off x="747360" y="169920"/>
+            <a:ext cx="11287800" cy="555120"/>
+          </a:xfrm>
+          <a:prstGeom prst="rect">
+            <a:avLst/>
+          </a:prstGeom>
+          <a:noFill/>
+          <a:ln w="0">
+            <a:noFill/>
+          </a:ln>
+        </p:spPr>
+        <p:style>
+          <a:lnRef idx="0"/>
+          <a:fillRef idx="0"/>
+          <a:effectRef idx="0"/>
+          <a:fontRef idx="minor"/>
+        </p:style>
+        <p:txBody>
+          <a:bodyPr lIns="0" tIns="0" rIns="0" bIns="107640" anchor="t">
+            <a:noAutofit/>
+          </a:bodyPr>
+          <a:p>
+            <a:r>
+              <a:rPr sz="2830" b="1">
+                <a:latin typeface="Yu Gothic UI"/>
+              </a:rPr>
+              <a:t>型態感知（auto）：買進當下鎖定「一種」策略</a:t>
+            </a:r>
+          </a:p>
+        </p:txBody>
+      </p:sp>
+      <p:sp>
+        <p:nvSpPr>
+          <p:cNvPr id="223" name="Text 1"/>
+          <p:cNvSpPr/>
+          <p:nvPr/>
+        </p:nvSpPr>
+        <p:spPr>
+          <a:xfrm>
+            <a:off x="717120" y="646200"/>
+            <a:ext cx="11227320" cy="413280"/>
+          </a:xfrm>
+          <a:prstGeom prst="rect">
+            <a:avLst/>
+          </a:prstGeom>
+          <a:noFill/>
+          <a:ln w="0">
+            <a:noFill/>
+          </a:ln>
+        </p:spPr>
+        <p:style>
+          <a:lnRef idx="0"/>
+          <a:fillRef idx="0"/>
+          <a:effectRef idx="0"/>
+          <a:fontRef idx="minor"/>
+        </p:style>
+        <p:txBody>
+          <a:bodyPr lIns="0" tIns="0" rIns="0" bIns="0" anchor="t">
+            <a:noAutofit/>
+          </a:bodyPr>
+          <a:p>
+            <a:r>
+              <a:rPr sz="2170" b="0">
+                <a:latin typeface="Yu Gothic UI"/>
+              </a:rPr>
+              <a:t>四種可能，分兩族；同一檔不混、不同檔可混</a:t>
+            </a:r>
+          </a:p>
+        </p:txBody>
+      </p:sp>
+      <p:graphicFrame>
+        <p:nvGraphicFramePr>
+          <p:cNvPr id="224" name="Table 0"/>
+          <p:cNvGraphicFramePr/>
+          <p:nvPr/>
+        </p:nvGraphicFramePr>
+        <p:xfrm>
+          <a:off x="684000" y="1117080"/>
+          <a:ext cx="11338560" cy="1920240"/>
+        </p:xfrm>
+        <a:graphic>
+          <a:graphicData uri="http://schemas.openxmlformats.org/drawingml/2006/table">
+            <a:tbl>
+              <a:tblPr/>
+              <a:tblGrid>
+                <a:gridCol w="2926080"/>
+                <a:gridCol w="6309360"/>
+                <a:gridCol w="2103120"/>
+              </a:tblGrid>
+              <a:tr h="384048">
+                <a:tc>
+                  <a:txBody>
+                    <a:bodyPr lIns="123480" tIns="56880" rIns="123480" bIns="56880" anchor="t">
+                      <a:noAutofit/>
+                    </a:bodyPr>
+                    <a:p>
+                      <a:r>
+                        <a:rPr sz="1100" b="1"/>
+                        <a:t>策略</a:t>
+                      </a:r>
+                    </a:p>
+                  </a:txBody>
+                  <a:tcPr anchor="t" marL="123480" marR="123480" marT="56880" marB="56880">
+                    <a:lnL w="12240">
+                      <a:solidFill>
+                        <a:srgbClr val="D1D9E0"/>
+                      </a:solidFill>
+                      <a:prstDash val="solid"/>
+                    </a:lnL>
+                    <a:lnR w="12240">
+                      <a:solidFill>
+                        <a:srgbClr val="D1D9E0"/>
+                      </a:solidFill>
+                      <a:prstDash val="solid"/>
+                    </a:lnR>
+                    <a:lnT w="12240">
+                      <a:solidFill>
+                        <a:srgbClr val="D1D9E0"/>
+                      </a:solidFill>
+                      <a:prstDash val="solid"/>
+                    </a:lnT>
+                    <a:lnB w="12240">
+                      <a:solidFill>
+                        <a:srgbClr val="D1D9E0"/>
+                      </a:solidFill>
+                      <a:prstDash val="solid"/>
+                    </a:lnB>
+                    <a:solidFill>
+                      <a:srgbClr val="FFFFFF"/>
+                    </a:solidFill>
+                  </a:tcPr>
+                </a:tc>
+                <a:tc>
+                  <a:txBody>
+                    <a:bodyPr lIns="123480" tIns="56880" rIns="123480" bIns="56880" anchor="t">
+                      <a:noAutofit/>
+                    </a:bodyPr>
+                    <a:p>
+                      <a:r>
+                        <a:rPr sz="1100" b="1"/>
+                        <a:t>被選到的型態條件（只看 ≤ 當日資料）</a:t>
+                      </a:r>
+                    </a:p>
+                  </a:txBody>
+                  <a:tcPr anchor="t" marL="123480" marR="123480" marT="56880" marB="56880">
+                    <a:lnL w="12240">
+                      <a:solidFill>
+                        <a:srgbClr val="D1D9E0"/>
+                      </a:solidFill>
+                      <a:prstDash val="solid"/>
+                    </a:lnL>
+                    <a:lnR w="12240">
+                      <a:solidFill>
+                        <a:srgbClr val="D1D9E0"/>
+                      </a:solidFill>
+                      <a:prstDash val="solid"/>
+                    </a:lnR>
+                    <a:lnT w="12240">
+                      <a:solidFill>
+                        <a:srgbClr val="D1D9E0"/>
+                      </a:solidFill>
+                      <a:prstDash val="solid"/>
+                    </a:lnT>
+                    <a:lnB w="12240">
+                      <a:solidFill>
+                        <a:srgbClr val="D1D9E0"/>
+                      </a:solidFill>
+                      <a:prstDash val="solid"/>
+                    </a:lnB>
+                    <a:solidFill>
+                      <a:srgbClr val="FFFFFF"/>
+                    </a:solidFill>
+                  </a:tcPr>
+                </a:tc>
+                <a:tc>
+                  <a:txBody>
+                    <a:bodyPr lIns="123480" tIns="56880" rIns="123480" bIns="56880" anchor="t">
+                      <a:noAutofit/>
+                    </a:bodyPr>
+                    <a:p>
+                      <a:r>
+                        <a:rPr sz="1100" b="1"/>
+                        <a:t>族群</a:t>
+                      </a:r>
+                    </a:p>
+                  </a:txBody>
+                  <a:tcPr anchor="t" marL="123480" marR="123480" marT="56880" marB="56880">
+                    <a:lnL w="12240">
+                      <a:solidFill>
+                        <a:srgbClr val="D1D9E0"/>
+                      </a:solidFill>
+                      <a:prstDash val="solid"/>
+                    </a:lnL>
+                    <a:lnR w="12240">
+                      <a:solidFill>
+                        <a:srgbClr val="D1D9E0"/>
+                      </a:solidFill>
+                      <a:prstDash val="solid"/>
+                    </a:lnR>
+                    <a:lnT w="12240">
+                      <a:solidFill>
+                        <a:srgbClr val="D1D9E0"/>
+                      </a:solidFill>
+                      <a:prstDash val="solid"/>
+                    </a:lnT>
+                    <a:lnB w="12240">
+                      <a:solidFill>
+                        <a:srgbClr val="D1D9E0"/>
+                      </a:solidFill>
+                      <a:prstDash val="solid"/>
+                    </a:lnB>
+                    <a:solidFill>
+                      <a:srgbClr val="FFFFFF"/>
+                    </a:solidFill>
+                  </a:tcPr>
+                </a:tc>
+              </a:tr>
+              <a:tr h="384048">
+                <a:tc>
+                  <a:txBody>
+                    <a:bodyPr lIns="123480" tIns="56880" rIns="123480" bIns="56880" anchor="t">
+                      <a:noAutofit/>
+                    </a:bodyPr>
+                    <a:p>
+                      <a:r>
+                        <a:rPr sz="1100"/>
+                        <a:t>Breakout 唐奇安突破</a:t>
+                      </a:r>
+                    </a:p>
+                  </a:txBody>
+                  <a:tcPr anchor="t" marL="123480" marR="123480" marT="56880" marB="56880">
+                    <a:lnL w="12240">
+                      <a:solidFill>
+                        <a:srgbClr val="D1D9E0"/>
+                      </a:solidFill>
+                      <a:prstDash val="solid"/>
+                    </a:lnL>
+                    <a:lnR w="12240">
+                      <a:solidFill>
+                        <a:srgbClr val="D1D9E0"/>
+                      </a:solidFill>
+                      <a:prstDash val="solid"/>
+                    </a:lnR>
+                    <a:lnT w="12240">
+                      <a:solidFill>
+                        <a:srgbClr val="D1D9E0"/>
+                      </a:solidFill>
+                      <a:prstDash val="solid"/>
+                    </a:lnT>
+                    <a:lnB w="12240">
+                      <a:solidFill>
+                        <a:srgbClr val="D1D9E0"/>
+                      </a:solidFill>
+                      <a:prstDash val="solid"/>
+                    </a:lnB>
+                    <a:solidFill>
+                      <a:srgbClr val="FFFFFF"/>
+                    </a:solidFill>
+                  </a:tcPr>
+                </a:tc>
+                <a:tc>
+                  <a:txBody>
+                    <a:bodyPr lIns="123480" tIns="56880" rIns="123480" bIns="56880" anchor="t">
+                      <a:noAutofit/>
+                    </a:bodyPr>
+                    <a:p>
+                      <a:r>
+                        <a:rPr sz="1100"/>
+                        <a:t>趨勢成立（價&gt;MA20、MA20&gt;MA60、20 日動能&gt;0）且動能 &gt;5%</a:t>
+                      </a:r>
+                    </a:p>
+                  </a:txBody>
+                  <a:tcPr anchor="t" marL="123480" marR="123480" marT="56880" marB="56880">
+                    <a:lnL w="12240">
+                      <a:solidFill>
+                        <a:srgbClr val="D1D9E0"/>
+                      </a:solidFill>
+                      <a:prstDash val="solid"/>
+                    </a:lnL>
+                    <a:lnR w="12240">
+                      <a:solidFill>
+                        <a:srgbClr val="D1D9E0"/>
+                      </a:solidFill>
+                      <a:prstDash val="solid"/>
+                    </a:lnR>
+                    <a:lnT w="12240">
+                      <a:solidFill>
+                        <a:srgbClr val="D1D9E0"/>
+                      </a:solidFill>
+                      <a:prstDash val="solid"/>
+                    </a:lnT>
+                    <a:lnB w="12240">
+                      <a:solidFill>
+                        <a:srgbClr val="D1D9E0"/>
+                      </a:solidFill>
+                      <a:prstDash val="solid"/>
+                    </a:lnB>
+                    <a:solidFill>
+                      <a:srgbClr val="FFFFFF"/>
+                    </a:solidFill>
+                  </a:tcPr>
+                </a:tc>
+                <a:tc>
+                  <a:txBody>
+                    <a:bodyPr lIns="123480" tIns="56880" rIns="123480" bIns="56880" anchor="t">
+                      <a:noAutofit/>
+                    </a:bodyPr>
+                    <a:p>
+                      <a:r>
+                        <a:rPr sz="1100"/>
+                        <a:t>順勢 追強</a:t>
+                      </a:r>
+                    </a:p>
+                  </a:txBody>
+                  <a:tcPr anchor="t" marL="123480" marR="123480" marT="56880" marB="56880">
+                    <a:lnL w="12240">
+                      <a:solidFill>
+                        <a:srgbClr val="D1D9E0"/>
+                      </a:solidFill>
+                      <a:prstDash val="solid"/>
+                    </a:lnL>
+                    <a:lnR w="12240">
+                      <a:solidFill>
+                        <a:srgbClr val="D1D9E0"/>
+                      </a:solidFill>
+                      <a:prstDash val="solid"/>
+                    </a:lnR>
+                    <a:lnT w="12240">
+                      <a:solidFill>
+                        <a:srgbClr val="D1D9E0"/>
+                      </a:solidFill>
+                      <a:prstDash val="solid"/>
+                    </a:lnT>
+                    <a:lnB w="12240">
+                      <a:solidFill>
+                        <a:srgbClr val="D1D9E0"/>
+                      </a:solidFill>
+                      <a:prstDash val="solid"/>
+                    </a:lnB>
+                    <a:solidFill>
+                      <a:srgbClr val="FFFFFF"/>
+                    </a:solidFill>
+                  </a:tcPr>
+                </a:tc>
+              </a:tr>
+              <a:tr h="384048">
+                <a:tc>
+                  <a:txBody>
+                    <a:bodyPr lIns="123480" tIns="56880" rIns="123480" bIns="56880" anchor="t">
+                      <a:noAutofit/>
+                    </a:bodyPr>
+                    <a:p>
+                      <a:r>
+                        <a:rPr sz="1100"/>
+                        <a:t>MA Cross 均線交叉</a:t>
+                      </a:r>
+                    </a:p>
+                  </a:txBody>
+                  <a:tcPr anchor="t" marL="123480" marR="123480" marT="56880" marB="56880">
+                    <a:lnL w="12240">
+                      <a:solidFill>
+                        <a:srgbClr val="D1D9E0"/>
+                      </a:solidFill>
+                      <a:prstDash val="solid"/>
+                    </a:lnL>
+                    <a:lnR w="12240">
+                      <a:solidFill>
+                        <a:srgbClr val="D1D9E0"/>
+                      </a:solidFill>
+                      <a:prstDash val="solid"/>
+                    </a:lnR>
+                    <a:lnT w="12240">
+                      <a:solidFill>
+                        <a:srgbClr val="D1D9E0"/>
+                      </a:solidFill>
+                      <a:prstDash val="solid"/>
+                    </a:lnT>
+                    <a:lnB w="12240">
+                      <a:solidFill>
+                        <a:srgbClr val="D1D9E0"/>
+                      </a:solidFill>
+                      <a:prstDash val="solid"/>
+                    </a:lnB>
+                    <a:solidFill>
+                      <a:srgbClr val="F6F8FA"/>
+                    </a:solidFill>
+                  </a:tcPr>
+                </a:tc>
+                <a:tc>
+                  <a:txBody>
+                    <a:bodyPr lIns="123480" tIns="56880" rIns="123480" bIns="56880" anchor="t">
+                      <a:noAutofit/>
+                    </a:bodyPr>
+                    <a:p>
+                      <a:r>
+                        <a:rPr sz="1100"/>
+                        <a:t>趨勢成立，但 20 日動能 ≤5%</a:t>
+                      </a:r>
+                    </a:p>
+                  </a:txBody>
+                  <a:tcPr anchor="t" marL="123480" marR="123480" marT="56880" marB="56880">
+                    <a:lnL w="12240">
+                      <a:solidFill>
+                        <a:srgbClr val="D1D9E0"/>
+                      </a:solidFill>
+                      <a:prstDash val="solid"/>
+                    </a:lnL>
+                    <a:lnR w="12240">
+                      <a:solidFill>
+                        <a:srgbClr val="D1D9E0"/>
+                      </a:solidFill>
+                      <a:prstDash val="solid"/>
+                    </a:lnR>
+                    <a:lnT w="12240">
+                      <a:solidFill>
+                        <a:srgbClr val="D1D9E0"/>
+                      </a:solidFill>
+                      <a:prstDash val="solid"/>
+                    </a:lnT>
+                    <a:lnB w="12240">
+                      <a:solidFill>
+                        <a:srgbClr val="D1D9E0"/>
+                      </a:solidFill>
+                      <a:prstDash val="solid"/>
+                    </a:lnB>
+                    <a:solidFill>
+                      <a:srgbClr val="F6F8FA"/>
+                    </a:solidFill>
+                  </a:tcPr>
+                </a:tc>
+                <a:tc>
+                  <a:txBody>
+                    <a:bodyPr lIns="123480" tIns="56880" rIns="123480" bIns="56880" anchor="t">
+                      <a:noAutofit/>
+                    </a:bodyPr>
+                    <a:p>
+                      <a:r>
+                        <a:rPr sz="1100"/>
+                        <a:t>順勢 追強</a:t>
+                      </a:r>
+                    </a:p>
+                  </a:txBody>
+                  <a:tcPr anchor="t" marL="123480" marR="123480" marT="56880" marB="56880">
+                    <a:lnL w="12240">
+                      <a:solidFill>
+                        <a:srgbClr val="D1D9E0"/>
+                      </a:solidFill>
+                      <a:prstDash val="solid"/>
+                    </a:lnL>
+                    <a:lnR w="12240">
+                      <a:solidFill>
+                        <a:srgbClr val="D1D9E0"/>
+                      </a:solidFill>
+                      <a:prstDash val="solid"/>
+                    </a:lnR>
+                    <a:lnT w="12240">
+                      <a:solidFill>
+                        <a:srgbClr val="D1D9E0"/>
+                      </a:solidFill>
+                      <a:prstDash val="solid"/>
+                    </a:lnT>
+                    <a:lnB w="12240">
+                      <a:solidFill>
+                        <a:srgbClr val="D1D9E0"/>
+                      </a:solidFill>
+                      <a:prstDash val="solid"/>
+                    </a:lnB>
+                    <a:solidFill>
+                      <a:srgbClr val="F6F8FA"/>
+                    </a:solidFill>
+                  </a:tcPr>
+                </a:tc>
+              </a:tr>
+              <a:tr h="384048">
+                <a:tc>
+                  <a:txBody>
+                    <a:bodyPr lIns="123480" tIns="56880" rIns="123480" bIns="56880" anchor="t">
+                      <a:noAutofit/>
+                    </a:bodyPr>
+                    <a:p>
+                      <a:r>
+                        <a:rPr sz="1100"/>
+                        <a:t>Bollinger 布林反轉</a:t>
+                      </a:r>
+                    </a:p>
+                  </a:txBody>
+                  <a:tcPr anchor="t" marL="123480" marR="123480" marT="56880" marB="56880">
+                    <a:lnL w="12240">
+                      <a:solidFill>
+                        <a:srgbClr val="D1D9E0"/>
+                      </a:solidFill>
+                      <a:prstDash val="solid"/>
+                    </a:lnL>
+                    <a:lnR w="12240">
+                      <a:solidFill>
+                        <a:srgbClr val="D1D9E0"/>
+                      </a:solidFill>
+                      <a:prstDash val="solid"/>
+                    </a:lnR>
+                    <a:lnT w="12240">
+                      <a:solidFill>
+                        <a:srgbClr val="D1D9E0"/>
+                      </a:solidFill>
+                      <a:prstDash val="solid"/>
+                    </a:lnT>
+                    <a:lnB w="12240">
+                      <a:solidFill>
+                        <a:srgbClr val="D1D9E0"/>
+                      </a:solidFill>
+                      <a:prstDash val="solid"/>
+                    </a:lnB>
+                    <a:solidFill>
+                      <a:srgbClr val="FFFFFF"/>
+                    </a:solidFill>
+                  </a:tcPr>
+                </a:tc>
+                <a:tc>
+                  <a:txBody>
+                    <a:bodyPr lIns="123480" tIns="56880" rIns="123480" bIns="56880" anchor="t">
+                      <a:noAutofit/>
+                    </a:bodyPr>
+                    <a:p>
+                      <a:r>
+                        <a:rPr sz="1100"/>
+                        <a:t>非趨勢，且股價 &lt; MA20（回檔／超跌）</a:t>
+                      </a:r>
+                    </a:p>
+                  </a:txBody>
+                  <a:tcPr anchor="t" marL="123480" marR="123480" marT="56880" marB="56880">
+                    <a:lnL w="12240">
+                      <a:solidFill>
+                        <a:srgbClr val="D1D9E0"/>
+                      </a:solidFill>
+                      <a:prstDash val="solid"/>
+                    </a:lnL>
+                    <a:lnR w="12240">
+                      <a:solidFill>
+                        <a:srgbClr val="D1D9E0"/>
+                      </a:solidFill>
+                      <a:prstDash val="solid"/>
+                    </a:lnR>
+                    <a:lnT w="12240">
+                      <a:solidFill>
+                        <a:srgbClr val="D1D9E0"/>
+                      </a:solidFill>
+                      <a:prstDash val="solid"/>
+                    </a:lnT>
+                    <a:lnB w="12240">
+                      <a:solidFill>
+                        <a:srgbClr val="D1D9E0"/>
+                      </a:solidFill>
+                      <a:prstDash val="solid"/>
+                    </a:lnB>
+                    <a:solidFill>
+                      <a:srgbClr val="FFFFFF"/>
+                    </a:solidFill>
+                  </a:tcPr>
+                </a:tc>
+                <a:tc>
+                  <a:txBody>
+                    <a:bodyPr lIns="123480" tIns="56880" rIns="123480" bIns="56880" anchor="t">
+                      <a:noAutofit/>
+                    </a:bodyPr>
+                    <a:p>
+                      <a:r>
+                        <a:rPr sz="1100"/>
+                        <a:t>回歸 買低</a:t>
+                      </a:r>
+                    </a:p>
+                  </a:txBody>
+                  <a:tcPr anchor="t" marL="123480" marR="123480" marT="56880" marB="56880">
+                    <a:lnL w="12240">
+                      <a:solidFill>
+                        <a:srgbClr val="D1D9E0"/>
+                      </a:solidFill>
+                      <a:prstDash val="solid"/>
+                    </a:lnL>
+                    <a:lnR w="12240">
+                      <a:solidFill>
+                        <a:srgbClr val="D1D9E0"/>
+                      </a:solidFill>
+                      <a:prstDash val="solid"/>
+                    </a:lnR>
+                    <a:lnT w="12240">
+                      <a:solidFill>
+                        <a:srgbClr val="D1D9E0"/>
+                      </a:solidFill>
+                      <a:prstDash val="solid"/>
+                    </a:lnT>
+                    <a:lnB w="12240">
+                      <a:solidFill>
+                        <a:srgbClr val="D1D9E0"/>
+                      </a:solidFill>
+                      <a:prstDash val="solid"/>
+                    </a:lnB>
+                    <a:solidFill>
+                      <a:srgbClr val="FFFFFF"/>
+                    </a:solidFill>
+                  </a:tcPr>
+                </a:tc>
+              </a:tr>
+              <a:tr h="384048">
+                <a:tc>
+                  <a:txBody>
+                    <a:bodyPr lIns="123480" tIns="56880" rIns="123480" bIns="56880" anchor="t">
+                      <a:noAutofit/>
+                    </a:bodyPr>
+                    <a:p>
+                      <a:r>
+                        <a:rPr sz="1100"/>
+                        <a:t>VWAP 偏離回歸</a:t>
+                      </a:r>
+                    </a:p>
+                  </a:txBody>
+                  <a:tcPr anchor="t" marL="123480" marR="123480" marT="56880" marB="56880">
+                    <a:lnL w="12240">
+                      <a:solidFill>
+                        <a:srgbClr val="D1D9E0"/>
+                      </a:solidFill>
+                      <a:prstDash val="solid"/>
+                    </a:lnL>
+                    <a:lnR w="12240">
+                      <a:solidFill>
+                        <a:srgbClr val="D1D9E0"/>
+                      </a:solidFill>
+                      <a:prstDash val="solid"/>
+                    </a:lnR>
+                    <a:lnT w="12240">
+                      <a:solidFill>
+                        <a:srgbClr val="D1D9E0"/>
+                      </a:solidFill>
+                      <a:prstDash val="solid"/>
+                    </a:lnT>
+                    <a:lnB w="12240">
+                      <a:solidFill>
+                        <a:srgbClr val="D1D9E0"/>
+                      </a:solidFill>
+                      <a:prstDash val="solid"/>
+                    </a:lnB>
+                    <a:solidFill>
+                      <a:srgbClr val="F6F8FA"/>
+                    </a:solidFill>
+                  </a:tcPr>
+                </a:tc>
+                <a:tc>
+                  <a:txBody>
+                    <a:bodyPr lIns="123480" tIns="56880" rIns="123480" bIns="56880" anchor="t">
+                      <a:noAutofit/>
+                    </a:bodyPr>
+                    <a:p>
+                      <a:r>
+                        <a:rPr sz="1100"/>
+                        <a:t>非趨勢，但股價 ≥ MA20（盤整）</a:t>
+                      </a:r>
+                    </a:p>
+                  </a:txBody>
+                  <a:tcPr anchor="t" marL="123480" marR="123480" marT="56880" marB="56880">
+                    <a:lnL w="12240">
+                      <a:solidFill>
+                        <a:srgbClr val="D1D9E0"/>
+                      </a:solidFill>
+                      <a:prstDash val="solid"/>
+                    </a:lnL>
+                    <a:lnR w="12240">
+                      <a:solidFill>
+                        <a:srgbClr val="D1D9E0"/>
+                      </a:solidFill>
+                      <a:prstDash val="solid"/>
+                    </a:lnR>
+                    <a:lnT w="12240">
+                      <a:solidFill>
+                        <a:srgbClr val="D1D9E0"/>
+                      </a:solidFill>
+                      <a:prstDash val="solid"/>
+                    </a:lnT>
+                    <a:lnB w="12240">
+                      <a:solidFill>
+                        <a:srgbClr val="D1D9E0"/>
+                      </a:solidFill>
+                      <a:prstDash val="solid"/>
+                    </a:lnB>
+                    <a:solidFill>
+                      <a:srgbClr val="F6F8FA"/>
+                    </a:solidFill>
+                  </a:tcPr>
+                </a:tc>
+                <a:tc>
+                  <a:txBody>
+                    <a:bodyPr lIns="123480" tIns="56880" rIns="123480" bIns="56880" anchor="t">
+                      <a:noAutofit/>
+                    </a:bodyPr>
+                    <a:p>
+                      <a:r>
+                        <a:rPr sz="1100"/>
+                        <a:t>回歸 買低</a:t>
+                      </a:r>
+                    </a:p>
+                  </a:txBody>
+                  <a:tcPr anchor="t" marL="123480" marR="123480" marT="56880" marB="56880">
+                    <a:lnL w="12240">
+                      <a:solidFill>
+                        <a:srgbClr val="D1D9E0"/>
+                      </a:solidFill>
+                      <a:prstDash val="solid"/>
+                    </a:lnL>
+                    <a:lnR w="12240">
+                      <a:solidFill>
+                        <a:srgbClr val="D1D9E0"/>
+                      </a:solidFill>
+                      <a:prstDash val="solid"/>
+                    </a:lnR>
+                    <a:lnT w="12240">
+                      <a:solidFill>
+                        <a:srgbClr val="D1D9E0"/>
+                      </a:solidFill>
+                      <a:prstDash val="solid"/>
+                    </a:lnT>
+                    <a:lnB w="12240">
+                      <a:solidFill>
+                        <a:srgbClr val="D1D9E0"/>
+                      </a:solidFill>
+                      <a:prstDash val="solid"/>
+                    </a:lnB>
+                    <a:solidFill>
+                      <a:srgbClr val="F6F8FA"/>
+                    </a:solidFill>
+                  </a:tcPr>
+                </a:tc>
+              </a:tr>
+            </a:tbl>
+          </a:graphicData>
+        </a:graphic>
+      </p:graphicFrame>
+      <p:sp>
+        <p:nvSpPr>
+          <p:cNvPr id="225" name="Text 2"/>
+          <p:cNvSpPr/>
+          <p:nvPr/>
+        </p:nvSpPr>
+        <p:spPr>
+          <a:xfrm>
+            <a:off x="717120" y="3415680"/>
+            <a:ext cx="11287800" cy="378720"/>
+          </a:xfrm>
+          <a:prstGeom prst="rect">
+            <a:avLst/>
+          </a:prstGeom>
+          <a:noFill/>
+          <a:ln w="0">
+            <a:noFill/>
+          </a:ln>
+        </p:spPr>
+        <p:style>
+          <a:lnRef idx="0"/>
+          <a:fillRef idx="0"/>
+          <a:effectRef idx="0"/>
+          <a:fontRef idx="minor"/>
+        </p:style>
+        <p:txBody>
+          <a:bodyPr lIns="0" tIns="0" rIns="0" bIns="0" anchor="t">
+            <a:noAutofit/>
+          </a:bodyPr>
+          <a:p>
+            <a:r>
+              <a:rPr sz="2400" b="1">
+                <a:latin typeface="Yu Gothic UI"/>
+              </a:rPr>
+              <a:t>鎖定時機：買進前每天重判 ➜ 成交當下鎖定 ➜ 賣出才釋放</a:t>
+            </a:r>
+          </a:p>
+        </p:txBody>
+      </p:sp>
+      <p:sp>
+        <p:nvSpPr>
+          <p:cNvPr id="228" name="Text 5"/>
+          <p:cNvSpPr/>
+          <p:nvPr/>
+        </p:nvSpPr>
+        <p:spPr>
+          <a:xfrm>
+            <a:off x="684000" y="3931920"/>
+            <a:ext cx="11124000" cy="2286000"/>
+          </a:xfrm>
+          <a:prstGeom prst="rect">
+            <a:avLst/>
+          </a:prstGeom>
+          <a:noFill/>
+          <a:ln w="0">
+            <a:noFill/>
+          </a:ln>
+        </p:spPr>
+        <p:style>
+          <a:lnRef idx="0"/>
+          <a:fillRef idx="0"/>
+          <a:effectRef idx="0"/>
+          <a:fontRef idx="minor"/>
+        </p:style>
+        <p:txBody>
+          <a:bodyPr lIns="0" tIns="0" rIns="0" bIns="0" anchor="t">
+            <a:noAutofit/>
+          </a:bodyPr>
+          <a:p>
+            <a:r>
+              <a:rPr sz="2170" b="1">
+                <a:latin typeface="Segoe UI"/>
+              </a:rPr>
+              <a:t>• 買進前：每天依最新日 K 重判斷型態（進場前策略可能不同）</a:t>
+            </a:r>
+          </a:p>
+          <a:p>
+            <a:r>
+              <a:rPr sz="2170" b="1">
+                <a:latin typeface="Segoe UI"/>
+              </a:rPr>
+              <a:t>• 成交當下：鎖定並寫入 logs/auto_resolved.json；持有期間不換、重啟不重選</a:t>
+            </a:r>
+          </a:p>
+          <a:p>
+            <a:r>
+              <a:rPr sz="2170" b="1">
+                <a:latin typeface="Segoe UI"/>
+              </a:rPr>
+              <a:t>• 賣到 0 股：釋放鎖定；下次買進重新判斷</a:t>
+            </a:r>
+          </a:p>
+          <a:p>
+            <a:r>
+              <a:rPr sz="2170" b="1">
+                <a:latin typeface="Segoe UI"/>
+              </a:rPr>
+              <a:t>• immediate 模式：名單一出現，第一個日 K 窗口就進場 ⇒ 進場當天型態＝鎖定策略</a:t>
+            </a:r>
+          </a:p>
+          <a:p>
+            <a:r>
+              <a:rPr sz="2170" b="1">
+                <a:latin typeface="Segoe UI"/>
+              </a:rPr>
+              <a:t>• 注意：選股建議表的 auto→X 是「基準日」路由；實際鎖定在「成交日」（差 1 個交易日，可能不同）</a:t>
+            </a:r>
+          </a:p>
+        </p:txBody>
+      </p:sp>
+    </p:spTree>
+  </p:cSld>
+  <p:clrMapOvr>
+    <a:masterClrMapping/>
+  </p:clrMapOvr>
+</p:sld>
+</file>
+
+<file path=ppt/slides/slide24.xml><?xml version="1.0" encoding="utf-8"?>
 <p:sld xmlns:a="http://schemas.openxmlformats.org/drawingml/2006/main" xmlns:p="http://schemas.openxmlformats.org/presentationml/2006/main" xmlns:r="http://schemas.openxmlformats.org/officeDocument/2006/relationships" xmlns:p14="http://schemas.microsoft.com/office/powerpoint/2010/main" xmlns:p15="http://schemas.microsoft.com/office/powerpoint/2012/main" xmlns:mc="http://schemas.openxmlformats.org/markup-compatibility/2006">
   <p:cSld>
     <p:spTree>
@@ -24465,7 +25437,7 @@
 </p:sld>
 </file>
 
-<file path=ppt/slides/slide24.xml><?xml version="1.0" encoding="utf-8"?>
+<file path=ppt/slides/slide25.xml><?xml version="1.0" encoding="utf-8"?>
 <p:sld xmlns:a="http://schemas.openxmlformats.org/drawingml/2006/main" xmlns:p="http://schemas.openxmlformats.org/presentationml/2006/main" xmlns:r="http://schemas.openxmlformats.org/officeDocument/2006/relationships" xmlns:p14="http://schemas.microsoft.com/office/powerpoint/2010/main" xmlns:p15="http://schemas.microsoft.com/office/powerpoint/2012/main" xmlns:mc="http://schemas.openxmlformats.org/markup-compatibility/2006">
   <p:cSld>
     <p:bg>
@@ -26379,7 +27351,7 @@
 </p:sld>
 </file>
 
-<file path=ppt/slides/slide25.xml><?xml version="1.0" encoding="utf-8"?>
+<file path=ppt/slides/slide26.xml><?xml version="1.0" encoding="utf-8"?>
 <p:sld xmlns:a="http://schemas.openxmlformats.org/drawingml/2006/main" xmlns:p="http://schemas.openxmlformats.org/presentationml/2006/main" xmlns:r="http://schemas.openxmlformats.org/officeDocument/2006/relationships" xmlns:p14="http://schemas.microsoft.com/office/powerpoint/2010/main" xmlns:p15="http://schemas.microsoft.com/office/powerpoint/2012/main" xmlns:mc="http://schemas.openxmlformats.org/markup-compatibility/2006">
   <p:cSld>
     <p:spTree>
@@ -27400,7 +28372,7 @@
 </p:sld>
 </file>
 
-<file path=ppt/slides/slide26.xml><?xml version="1.0" encoding="utf-8"?>
+<file path=ppt/slides/slide27.xml><?xml version="1.0" encoding="utf-8"?>
 <p:sld xmlns:a="http://schemas.openxmlformats.org/drawingml/2006/main" xmlns:p="http://schemas.openxmlformats.org/presentationml/2006/main" xmlns:r="http://schemas.openxmlformats.org/officeDocument/2006/relationships" xmlns:p14="http://schemas.microsoft.com/office/powerpoint/2010/main" xmlns:p15="http://schemas.microsoft.com/office/powerpoint/2012/main" xmlns:mc="http://schemas.openxmlformats.org/markup-compatibility/2006">
   <p:cSld>
     <p:spTree>

--- a/plans/ppt/TW-SELFSELECT台股買賣自動化系統-W4-講稿版.pptx
+++ b/plans/ppt/TW-SELFSELECT台股買賣自動化系統-W4-講稿版.pptx
@@ -20848,6 +20848,7 @@
               </a:tabLst>
             </a:pPr>
             <a:r>
+              <a:rPr/>
               <a:t>本系統提供5個策略=&gt;布林通道,MA CROSS,唐安奇通道,VWAP反轉,KEEP_WAIT(低接高賣)</a:t>
             </a:r>
             <a:endParaRPr lang="en-US" sz="3200" b="0" u="none" strike="noStrike">

--- a/plans/ppt/TW-SELFSELECT台股買賣自動化系統-W4-講稿版.pptx
+++ b/plans/ppt/TW-SELFSELECT台股買賣自動化系統-W4-講稿版.pptx
@@ -31,6 +31,7 @@
     <p:sldId id="275" r:id="rId24"/>
     <p:sldId id="276" r:id="rId25"/>
     <p:sldId id="277" r:id="rId26"/>
+    <p:sldId id="296" r:id="rId33"/>
     <p:sldId id="295" r:id="rId32"/>
     <p:sldId id="289" r:id="rId38"/>
     <p:sldId id="290" r:id="rId39"/>
@@ -2362,6 +2363,103 @@
       </p:sp>
     </p:spTree>
   </p:cSld>
+</p:notes>
+</file>
+
+<file path=ppt/notesSlides/notesSlide24.xml><?xml version="1.0" encoding="utf-8"?>
+<p:notes xmlns:a="http://schemas.openxmlformats.org/drawingml/2006/main" xmlns:p="http://schemas.openxmlformats.org/presentationml/2006/main" xmlns:r="http://schemas.openxmlformats.org/officeDocument/2006/relationships">
+  <p:cSld>
+    <p:spTree>
+      <p:nvGrpSpPr>
+        <p:cNvPr id="1" name=""/>
+        <p:cNvGrpSpPr/>
+        <p:nvPr/>
+      </p:nvGrpSpPr>
+      <p:grpSpPr>
+        <a:xfrm>
+          <a:off x="0" y="0"/>
+          <a:ext cx="0" cy="0"/>
+          <a:chOff x="0" y="0"/>
+          <a:chExt cx="0" cy="0"/>
+        </a:xfrm>
+      </p:grpSpPr>
+      <p:sp>
+        <p:nvSpPr>
+          <p:cNvPr id="2" name="Slide Image Placeholder 1"/>
+          <p:cNvSpPr>
+            <a:spLocks noGrp="1"/>
+          </p:cNvSpPr>
+          <p:nvPr>
+            <p:ph type="sldImg"/>
+          </p:nvPr>
+        </p:nvSpPr>
+        <p:spPr/>
+      </p:sp>
+      <p:sp>
+        <p:nvSpPr>
+          <p:cNvPr id="3" name="Notes Placeholder 2"/>
+          <p:cNvSpPr>
+            <a:spLocks noGrp="1"/>
+          </p:cNvSpPr>
+          <p:nvPr>
+            <p:ph type="body"/>
+          </p:nvPr>
+        </p:nvSpPr>
+        <p:spPr/>
+        <p:txBody>
+          <a:bodyPr/>
+          <a:lstStyle/>
+          <a:p>
+            <a:r>
+              <a:t>⏱ 建議時間：1 分 30 秒</a:t>
+            </a:r>
+          </a:p>
+          <a:p/>
+          <a:p>
+            <a:r>
+              <a:t>這頁講 keep_wait 的實務用法：它由你人工管理，系統只負責執行紀律。</a:t>
+            </a:r>
+          </a:p>
+          <a:p>
+            <a:r>
+              <a:t>系統會自動做：初始建倉（受 max_entry_price 擋價）、DCA 加碼、漲到停利賣一部分後冷卻。</a:t>
+            </a:r>
+          </a:p>
+          <a:p>
+            <a:r>
+              <a:t>系統不會做：每月選股不會新增、刪除或改它的 alloc；它也不計入 SELFSELECT_TOP_N 的檔數上限；auto 不會路由到它；immediate 也不會強制進場。</a:t>
+            </a:r>
+          </a:p>
+          <a:p>
+            <a:r>
+              <a:t>怎麼用：任何時間在 .env 加 PC_&lt;代號&gt;（strategy=keep_wait）就會生效；要調整直接改參數或 alloc；要下車請先賣到 0 股再刪條目——直接刪但還有持股，下個交易日孤兒清倉會把它賣掉，等於繞過停利規則。</a:t>
+            </a:r>
+          </a:p>
+          <a:p/>
+          <a:p>
+            <a:r>
+              <a:t>【講師提示】用「名單交給程式、keep_wait 的進出交給你自己」一句話收尾。</a:t>
+            </a:r>
+          </a:p>
+        </p:txBody>
+      </p:sp>
+      <p:sp>
+        <p:nvSpPr>
+          <p:cNvPr id="4" name="Slide Number Placeholder 3"/>
+          <p:cNvSpPr>
+            <a:spLocks noGrp="1"/>
+          </p:cNvSpPr>
+          <p:nvPr>
+            <p:ph type="sldNum" idx="24"/>
+          </p:nvPr>
+        </p:nvSpPr>
+        <p:spPr/>
+      </p:sp>
+    </p:spTree>
+  </p:cSld>
+  <p:clrMapOvr>
+    <a:masterClrMapping/>
+  </p:clrMapOvr>
 </p:notes>
 </file>
 
@@ -23362,6 +23460,571 @@
               <a:rPr sz="2830" b="1">
                 <a:latin typeface="Yu Gothic UI"/>
               </a:rPr>
+              <a:t>Keep &amp; Wait：人工管理怎麼用</a:t>
+            </a:r>
+          </a:p>
+        </p:txBody>
+      </p:sp>
+      <p:sp>
+        <p:nvSpPr>
+          <p:cNvPr id="223" name="Text 1"/>
+          <p:cNvSpPr/>
+          <p:nvPr/>
+        </p:nvSpPr>
+        <p:spPr>
+          <a:xfrm>
+            <a:off x="717120" y="646200"/>
+            <a:ext cx="11227320" cy="413280"/>
+          </a:xfrm>
+          <a:prstGeom prst="rect">
+            <a:avLst/>
+          </a:prstGeom>
+          <a:noFill/>
+          <a:ln w="0">
+            <a:noFill/>
+          </a:ln>
+        </p:spPr>
+        <p:style>
+          <a:lnRef idx="0"/>
+          <a:fillRef idx="0"/>
+          <a:effectRef idx="0"/>
+          <a:fontRef idx="minor"/>
+        </p:style>
+        <p:txBody>
+          <a:bodyPr lIns="0" tIns="0" rIns="0" bIns="0" anchor="t">
+            <a:noAutofit/>
+          </a:bodyPr>
+          <a:p>
+            <a:r>
+              <a:rPr sz="2170" b="0">
+                <a:latin typeface="Yu Gothic UI"/>
+              </a:rPr>
+              <a:t>系統自動執行紀律；名單（誰被選中）不歸它管</a:t>
+            </a:r>
+          </a:p>
+        </p:txBody>
+      </p:sp>
+      <p:sp>
+        <p:nvSpPr>
+          <p:cNvPr id="225" name="Text 2"/>
+          <p:cNvSpPr/>
+          <p:nvPr/>
+        </p:nvSpPr>
+        <p:spPr>
+          <a:xfrm>
+            <a:off x="717120" y="3415680"/>
+            <a:ext cx="11287800" cy="378720"/>
+          </a:xfrm>
+          <a:prstGeom prst="rect">
+            <a:avLst/>
+          </a:prstGeom>
+          <a:noFill/>
+          <a:ln w="0">
+            <a:noFill/>
+          </a:ln>
+        </p:spPr>
+        <p:style>
+          <a:lnRef idx="0"/>
+          <a:fillRef idx="0"/>
+          <a:effectRef idx="0"/>
+          <a:fontRef idx="minor"/>
+        </p:style>
+        <p:txBody>
+          <a:bodyPr lIns="0" tIns="0" rIns="0" bIns="0" anchor="t">
+            <a:noAutofit/>
+          </a:bodyPr>
+          <a:p>
+            <a:r>
+              <a:rPr sz="2400" b="1">
+                <a:solidFill>
+                  <a:srgbClr val="222222"/>
+                </a:solidFill>
+                <a:latin typeface="Yu Gothic UI"/>
+              </a:rPr>
+              <a:t>怎麼用：① 加 → ② 觀察自動執行 → ③ 要下車先賣再刪</a:t>
+            </a:r>
+          </a:p>
+        </p:txBody>
+      </p:sp>
+      <p:sp>
+        <p:nvSpPr>
+          <p:cNvPr id="228" name="Text 5"/>
+          <p:cNvSpPr/>
+          <p:nvPr/>
+        </p:nvSpPr>
+        <p:spPr>
+          <a:xfrm>
+            <a:off x="684000" y="3931920"/>
+            <a:ext cx="11124000" cy="2194560"/>
+          </a:xfrm>
+          <a:prstGeom prst="rect">
+            <a:avLst/>
+          </a:prstGeom>
+          <a:noFill/>
+          <a:ln w="0">
+            <a:noFill/>
+          </a:ln>
+        </p:spPr>
+        <p:style>
+          <a:lnRef idx="0"/>
+          <a:fillRef idx="0"/>
+          <a:effectRef idx="0"/>
+          <a:fontRef idx="minor"/>
+        </p:style>
+        <p:txBody>
+          <a:bodyPr lIns="0" tIns="0" rIns="0" bIns="0" anchor="t">
+            <a:noAutofit/>
+          </a:bodyPr>
+          <a:p>
+            <a:r>
+              <a:rPr sz="2170" b="1">
+                <a:solidFill>
+                  <a:srgbClr val="1F1F1F"/>
+                </a:solidFill>
+                <a:latin typeface="Segoe UI"/>
+              </a:rPr>
+              <a:t>• 加：任何時間在 .env 加 PC_&lt;代號&gt;{"strategy":"keep_wait","alloc":20,...}，1 分鐘內熱重載（不必部署）</a:t>
+            </a:r>
+          </a:p>
+          <a:p>
+            <a:r>
+              <a:rPr sz="2170" b="1">
+                <a:solidFill>
+                  <a:srgbClr val="1F1F1F"/>
+                </a:solidFill>
+                <a:latin typeface="Segoe UI"/>
+              </a:rPr>
+              <a:t>• 改：直接改參數／alloc（只影響後續加碼與資金滾入，不會立刻賣）</a:t>
+            </a:r>
+          </a:p>
+          <a:p>
+            <a:r>
+              <a:rPr sz="2170" b="1">
+                <a:solidFill>
+                  <a:srgbClr val="1F1F1F"/>
+                </a:solidFill>
+                <a:latin typeface="Segoe UI"/>
+              </a:rPr>
+              <a:t>• 下車：先賣到 0 股，再刪 PC_ 條目；直接刪但仍有持股 ⇒ 下個交易日 09:00 孤兒清倉會賣掉（繞過停利規則）</a:t>
+            </a:r>
+          </a:p>
+          <a:p>
+            <a:r>
+              <a:rPr sz="2170" b="1">
+                <a:solidFill>
+                  <a:srgbClr val="1F1F1F"/>
+                </a:solidFill>
+                <a:latin typeface="Segoe UI"/>
+              </a:rPr>
+              <a:t>• 限制：auto 不會路由到 keep_wait；immediate 不會強制進場；每日「買入不足補足」也不處理它；也不計入 SELFSELECT_TOP_N 檔數上限</a:t>
+            </a:r>
+          </a:p>
+        </p:txBody>
+      </p:sp>
+      <p:graphicFrame>
+        <p:nvGraphicFramePr>
+          <p:cNvPr id="229" name="Table 228"/>
+          <p:cNvGraphicFramePr>
+            <a:graphicFrameLocks noGrp="1"/>
+          </p:cNvGraphicFramePr>
+          <p:nvPr/>
+        </p:nvGraphicFramePr>
+        <p:xfrm>
+          <a:off x="684000" y="1117080"/>
+          <a:ext cx="11704320" cy="1883664"/>
+        </p:xfrm>
+        <a:graphic>
+          <a:graphicData uri="http://schemas.openxmlformats.org/drawingml/2006/table">
+            <a:tbl>
+              <a:tblPr firstRow="1" bandRow="1">
+                <a:tableStyleId>{5C22544A-7EE6-4342-B048-85BDC9FD1C3A}</a:tableStyleId>
+              </a:tblPr>
+              <a:tblGrid>
+                <a:gridCol w="2743200"/>
+                <a:gridCol w="6766560"/>
+                <a:gridCol w="2194560"/>
+              </a:tblGrid>
+              <a:tr h="347472">
+                <a:tc>
+                  <a:txBody>
+                    <a:bodyPr/>
+                    <a:lstStyle/>
+                    <a:p>
+                      <a:r>
+                        <a:rPr sz="1300" b="1">
+                          <a:solidFill>
+                            <a:srgbClr val="FFFFFF"/>
+                          </a:solidFill>
+                        </a:rPr>
+                        <a:t>動作</a:t>
+                      </a:r>
+                    </a:p>
+                  </a:txBody>
+                  <a:tcPr>
+                    <a:solidFill>
+                      <a:srgbClr val="2C3E50"/>
+                    </a:solidFill>
+                  </a:tcPr>
+                </a:tc>
+                <a:tc>
+                  <a:txBody>
+                    <a:bodyPr/>
+                    <a:lstStyle/>
+                    <a:p>
+                      <a:r>
+                        <a:rPr sz="1300" b="1">
+                          <a:solidFill>
+                            <a:srgbClr val="FFFFFF"/>
+                          </a:solidFill>
+                        </a:rPr>
+                        <a:t>keep_wait 會自動做？</a:t>
+                      </a:r>
+                    </a:p>
+                  </a:txBody>
+                  <a:tcPr>
+                    <a:solidFill>
+                      <a:srgbClr val="2C3E50"/>
+                    </a:solidFill>
+                  </a:tcPr>
+                </a:tc>
+                <a:tc>
+                  <a:txBody>
+                    <a:bodyPr/>
+                    <a:lstStyle/>
+                    <a:p>
+                      <a:r>
+                        <a:rPr sz="1300" b="1">
+                          <a:solidFill>
+                            <a:srgbClr val="FFFFFF"/>
+                          </a:solidFill>
+                        </a:rPr>
+                        <a:t>你要做什麼</a:t>
+                      </a:r>
+                    </a:p>
+                  </a:txBody>
+                  <a:tcPr>
+                    <a:solidFill>
+                      <a:srgbClr val="2C3E50"/>
+                    </a:solidFill>
+                  </a:tcPr>
+                </a:tc>
+              </a:tr>
+              <a:tr h="384048">
+                <a:tc>
+                  <a:txBody>
+                    <a:bodyPr/>
+                    <a:lstStyle/>
+                    <a:p>
+                      <a:r>
+                        <a:rPr sz="1200" b="0">
+                          <a:solidFill>
+                            <a:srgbClr val="222222"/>
+                          </a:solidFill>
+                        </a:rPr>
+                        <a:t>初始建倉</a:t>
+                      </a:r>
+                    </a:p>
+                  </a:txBody>
+                  <a:tcPr>
+                    <a:solidFill>
+                      <a:srgbClr val="FFFFFF"/>
+                    </a:solidFill>
+                  </a:tcPr>
+                </a:tc>
+                <a:tc>
+                  <a:txBody>
+                    <a:bodyPr/>
+                    <a:lstStyle/>
+                    <a:p>
+                      <a:r>
+                        <a:rPr sz="1200" b="0">
+                          <a:solidFill>
+                            <a:srgbClr val="222222"/>
+                          </a:solidFill>
+                        </a:rPr>
+                        <a:t>買 initial_shares（現價 &gt; max_entry_price 則跳過）</a:t>
+                      </a:r>
+                    </a:p>
+                  </a:txBody>
+                  <a:tcPr>
+                    <a:solidFill>
+                      <a:srgbClr val="FFFFFF"/>
+                    </a:solidFill>
+                  </a:tcPr>
+                </a:tc>
+                <a:tc>
+                  <a:txBody>
+                    <a:bodyPr/>
+                    <a:lstStyle/>
+                    <a:p>
+                      <a:r>
+                        <a:rPr sz="1200" b="0">
+                          <a:solidFill>
+                            <a:srgbClr val="222222"/>
+                          </a:solidFill>
+                        </a:rPr>
+                        <a:t>決定 alloc 與參數</a:t>
+                      </a:r>
+                    </a:p>
+                  </a:txBody>
+                  <a:tcPr>
+                    <a:solidFill>
+                      <a:srgbClr val="FFFFFF"/>
+                    </a:solidFill>
+                  </a:tcPr>
+                </a:tc>
+              </a:tr>
+              <a:tr h="384048">
+                <a:tc>
+                  <a:txBody>
+                    <a:bodyPr/>
+                    <a:lstStyle/>
+                    <a:p>
+                      <a:r>
+                        <a:rPr sz="1200" b="0">
+                          <a:solidFill>
+                            <a:srgbClr val="222222"/>
+                          </a:solidFill>
+                        </a:rPr>
+                        <a:t>DCA 加碼</a:t>
+                      </a:r>
+                    </a:p>
+                  </a:txBody>
+                  <a:tcPr>
+                    <a:solidFill>
+                      <a:srgbClr val="FFFFFF"/>
+                    </a:solidFill>
+                  </a:tcPr>
+                </a:tc>
+                <a:tc>
+                  <a:txBody>
+                    <a:bodyPr/>
+                    <a:lstStyle/>
+                    <a:p>
+                      <a:r>
+                        <a:rPr sz="1200" b="0">
+                          <a:solidFill>
+                            <a:srgbClr val="222222"/>
+                          </a:solidFill>
+                        </a:rPr>
+                        <a:t>回跌 ≥ add_drop_pct% 加 add_shares（最多 max_additions 次）</a:t>
+                      </a:r>
+                    </a:p>
+                  </a:txBody>
+                  <a:tcPr>
+                    <a:solidFill>
+                      <a:srgbClr val="FFFFFF"/>
+                    </a:solidFill>
+                  </a:tcPr>
+                </a:tc>
+                <a:tc>
+                  <a:txBody>
+                    <a:bodyPr/>
+                    <a:lstStyle/>
+                    <a:p>
+                      <a:r>
+                        <a:rPr sz="1200" b="0">
+                          <a:solidFill>
+                            <a:srgbClr val="222222"/>
+                          </a:solidFill>
+                        </a:rPr>
+                        <a:t>想加碼就改參數</a:t>
+                      </a:r>
+                    </a:p>
+                  </a:txBody>
+                  <a:tcPr>
+                    <a:solidFill>
+                      <a:srgbClr val="FFFFFF"/>
+                    </a:solidFill>
+                  </a:tcPr>
+                </a:tc>
+              </a:tr>
+              <a:tr h="384048">
+                <a:tc>
+                  <a:txBody>
+                    <a:bodyPr/>
+                    <a:lstStyle/>
+                    <a:p>
+                      <a:r>
+                        <a:rPr sz="1200" b="0">
+                          <a:solidFill>
+                            <a:srgbClr val="222222"/>
+                          </a:solidFill>
+                        </a:rPr>
+                        <a:t>停利</a:t>
+                      </a:r>
+                    </a:p>
+                  </a:txBody>
+                  <a:tcPr>
+                    <a:solidFill>
+                      <a:srgbClr val="FFFFFF"/>
+                    </a:solidFill>
+                  </a:tcPr>
+                </a:tc>
+                <a:tc>
+                  <a:txBody>
+                    <a:bodyPr/>
+                    <a:lstStyle/>
+                    <a:p>
+                      <a:r>
+                        <a:rPr sz="1200" b="0">
+                          <a:solidFill>
+                            <a:srgbClr val="222222"/>
+                          </a:solidFill>
+                        </a:rPr>
+                        <a:t>漲 ≥ tp_trigger_pct% 賣 tp_sell_ratio%（或 tp_tiers 分層）＋冷卻</a:t>
+                      </a:r>
+                    </a:p>
+                  </a:txBody>
+                  <a:tcPr>
+                    <a:solidFill>
+                      <a:srgbClr val="FFFFFF"/>
+                    </a:solidFill>
+                  </a:tcPr>
+                </a:tc>
+                <a:tc>
+                  <a:txBody>
+                    <a:bodyPr/>
+                    <a:lstStyle/>
+                    <a:p>
+                      <a:r>
+                        <a:rPr sz="1200" b="0">
+                          <a:solidFill>
+                            <a:srgbClr val="222222"/>
+                          </a:solidFill>
+                        </a:rPr>
+                        <a:t>分批停利設 tp_tiers</a:t>
+                      </a:r>
+                    </a:p>
+                  </a:txBody>
+                  <a:tcPr>
+                    <a:solidFill>
+                      <a:srgbClr val="FFFFFF"/>
+                    </a:solidFill>
+                  </a:tcPr>
+                </a:tc>
+              </a:tr>
+              <a:tr h="384048">
+                <a:tc>
+                  <a:txBody>
+                    <a:bodyPr/>
+                    <a:lstStyle/>
+                    <a:p>
+                      <a:r>
+                        <a:rPr sz="1200" b="0">
+                          <a:solidFill>
+                            <a:srgbClr val="222222"/>
+                          </a:solidFill>
+                        </a:rPr>
+                        <a:t>每月選股新增／汰換</a:t>
+                      </a:r>
+                    </a:p>
+                  </a:txBody>
+                  <a:tcPr>
+                    <a:solidFill>
+                      <a:srgbClr val="FFFFFF"/>
+                    </a:solidFill>
+                  </a:tcPr>
+                </a:tc>
+                <a:tc>
+                  <a:txBody>
+                    <a:bodyPr/>
+                    <a:lstStyle/>
+                    <a:p>
+                      <a:r>
+                        <a:rPr sz="1200" b="0">
+                          <a:solidFill>
+                            <a:srgbClr val="222222"/>
+                          </a:solidFill>
+                        </a:rPr>
+                        <a:t>✗ 不新增、不刪除、不改 alloc</a:t>
+                      </a:r>
+                    </a:p>
+                  </a:txBody>
+                  <a:tcPr>
+                    <a:solidFill>
+                      <a:srgbClr val="FFFFFF"/>
+                    </a:solidFill>
+                  </a:tcPr>
+                </a:tc>
+                <a:tc>
+                  <a:txBody>
+                    <a:bodyPr/>
+                    <a:lstStyle/>
+                    <a:p>
+                      <a:r>
+                        <a:rPr sz="1200" b="0">
+                          <a:solidFill>
+                            <a:srgbClr val="222222"/>
+                          </a:solidFill>
+                        </a:rPr>
+                        <a:t>想換股自己改 .env</a:t>
+                      </a:r>
+                    </a:p>
+                  </a:txBody>
+                  <a:tcPr>
+                    <a:solidFill>
+                      <a:srgbClr val="FFFFFF"/>
+                    </a:solidFill>
+                  </a:tcPr>
+                </a:tc>
+              </a:tr>
+            </a:tbl>
+          </a:graphicData>
+        </a:graphic>
+      </p:graphicFrame>
+    </p:spTree>
+  </p:cSld>
+  <p:clrMapOvr>
+    <a:masterClrMapping/>
+  </p:clrMapOvr>
+</p:sld>
+</file>
+
+<file path=ppt/slides/slide24.xml><?xml version="1.0" encoding="utf-8"?>
+<p:sld xmlns:a="http://schemas.openxmlformats.org/drawingml/2006/main" xmlns:p="http://schemas.openxmlformats.org/presentationml/2006/main" xmlns:r="http://schemas.openxmlformats.org/officeDocument/2006/relationships">
+  <p:cSld>
+    <p:spTree>
+      <p:nvGrpSpPr>
+        <p:cNvPr id="1" name=""/>
+        <p:cNvGrpSpPr/>
+        <p:nvPr/>
+      </p:nvGrpSpPr>
+      <p:grpSpPr/>
+      <p:sp>
+        <p:nvSpPr>
+          <p:cNvPr id="222" name="Text 0"/>
+          <p:cNvSpPr/>
+          <p:nvPr/>
+        </p:nvSpPr>
+        <p:spPr>
+          <a:xfrm>
+            <a:off x="747360" y="169920"/>
+            <a:ext cx="11287800" cy="555120"/>
+          </a:xfrm>
+          <a:prstGeom prst="rect">
+            <a:avLst/>
+          </a:prstGeom>
+          <a:noFill/>
+          <a:ln w="0">
+            <a:noFill/>
+          </a:ln>
+        </p:spPr>
+        <p:style>
+          <a:lnRef idx="0"/>
+          <a:fillRef idx="0"/>
+          <a:effectRef idx="0"/>
+          <a:fontRef idx="minor"/>
+        </p:style>
+        <p:txBody>
+          <a:bodyPr lIns="0" tIns="0" rIns="0" bIns="107640" anchor="t">
+            <a:noAutofit/>
+          </a:bodyPr>
+          <a:p>
+            <a:r>
+              <a:rPr sz="2830" b="1">
+                <a:latin typeface="Yu Gothic UI"/>
+              </a:rPr>
               <a:t>型態感知（auto）：買進當下鎖定「一種」策略</a:t>
             </a:r>
           </a:p>
@@ -24187,7 +24850,7 @@
 </p:sld>
 </file>
 
-<file path=ppt/slides/slide24.xml><?xml version="1.0" encoding="utf-8"?>
+<file path=ppt/slides/slide25.xml><?xml version="1.0" encoding="utf-8"?>
 <p:sld xmlns:a="http://schemas.openxmlformats.org/drawingml/2006/main" xmlns:p="http://schemas.openxmlformats.org/presentationml/2006/main" xmlns:r="http://schemas.openxmlformats.org/officeDocument/2006/relationships" xmlns:p14="http://schemas.microsoft.com/office/powerpoint/2010/main" xmlns:p15="http://schemas.microsoft.com/office/powerpoint/2012/main" xmlns:mc="http://schemas.openxmlformats.org/markup-compatibility/2006">
   <p:cSld>
     <p:spTree>
@@ -25438,7 +26101,7 @@
 </p:sld>
 </file>
 
-<file path=ppt/slides/slide25.xml><?xml version="1.0" encoding="utf-8"?>
+<file path=ppt/slides/slide26.xml><?xml version="1.0" encoding="utf-8"?>
 <p:sld xmlns:a="http://schemas.openxmlformats.org/drawingml/2006/main" xmlns:p="http://schemas.openxmlformats.org/presentationml/2006/main" xmlns:r="http://schemas.openxmlformats.org/officeDocument/2006/relationships" xmlns:p14="http://schemas.microsoft.com/office/powerpoint/2010/main" xmlns:p15="http://schemas.microsoft.com/office/powerpoint/2012/main" xmlns:mc="http://schemas.openxmlformats.org/markup-compatibility/2006">
   <p:cSld>
     <p:bg>
@@ -27352,7 +28015,7 @@
 </p:sld>
 </file>
 
-<file path=ppt/slides/slide26.xml><?xml version="1.0" encoding="utf-8"?>
+<file path=ppt/slides/slide27.xml><?xml version="1.0" encoding="utf-8"?>
 <p:sld xmlns:a="http://schemas.openxmlformats.org/drawingml/2006/main" xmlns:p="http://schemas.openxmlformats.org/presentationml/2006/main" xmlns:r="http://schemas.openxmlformats.org/officeDocument/2006/relationships" xmlns:p14="http://schemas.microsoft.com/office/powerpoint/2010/main" xmlns:p15="http://schemas.microsoft.com/office/powerpoint/2012/main" xmlns:mc="http://schemas.openxmlformats.org/markup-compatibility/2006">
   <p:cSld>
     <p:spTree>
@@ -28373,7 +29036,7 @@
 </p:sld>
 </file>
 
-<file path=ppt/slides/slide27.xml><?xml version="1.0" encoding="utf-8"?>
+<file path=ppt/slides/slide28.xml><?xml version="1.0" encoding="utf-8"?>
 <p:sld xmlns:a="http://schemas.openxmlformats.org/drawingml/2006/main" xmlns:p="http://schemas.openxmlformats.org/presentationml/2006/main" xmlns:r="http://schemas.openxmlformats.org/officeDocument/2006/relationships" xmlns:p14="http://schemas.microsoft.com/office/powerpoint/2010/main" xmlns:p15="http://schemas.microsoft.com/office/powerpoint/2012/main" xmlns:mc="http://schemas.openxmlformats.org/markup-compatibility/2006">
   <p:cSld>
     <p:spTree>
